--- a/index/designs/y9-l8/l2-word-building-layout/l2-word-building-layout.pptx
+++ b/index/designs/y9-l8/l2-word-building-layout/l2-word-building-layout.pptx
@@ -2026,15 +2026,6 @@
               </a:rPr>
               <a:t>组词</a:t>
             </a:r>
-            <a:pPr algn="ctr" indent="0" marL="0">
-              <a:lnSpc>
-                <a:spcPts val="8400"/>
-              </a:lnSpc>
-              <a:spcAft>
-                <a:spcPts val="1200"/>
-              </a:spcAft>
-              <a:buNone/>
-            </a:pPr>
             <a:r>
               <a:rPr lang="en-US" sz="8400" b="1" dirty="0">
                 <a:solidFill>
@@ -2046,15 +2037,6 @@
               </a:rPr>
               <a:t>·</a:t>
             </a:r>
-            <a:pPr algn="ctr" indent="0" marL="0">
-              <a:lnSpc>
-                <a:spcPts val="8400"/>
-              </a:lnSpc>
-              <a:spcAft>
-                <a:spcPts val="1200"/>
-              </a:spcAft>
-              <a:buNone/>
-            </a:pPr>
             <a:r>
               <a:rPr lang="en-US" sz="8400" dirty="0">
                 <a:solidFill>
@@ -3044,12 +3026,6 @@
               </a:rPr>
               <a:t>Turn-and-talk (2 min):</a:t>
             </a:r>
-            <a:pPr algn="l" indent="0" marL="0">
-              <a:lnSpc>
-                <a:spcPts val="1470"/>
-              </a:lnSpc>
-              <a:buNone/>
-            </a:pPr>
             <a:r>
               <a:rPr lang="en-US" sz="1050" dirty="0">
                 <a:solidFill>
@@ -3174,12 +3150,6 @@
               </a:rPr>
               <a:t>Individual writing (3 min):</a:t>
             </a:r>
-            <a:pPr algn="l" indent="0" marL="0">
-              <a:lnSpc>
-                <a:spcPts val="1470"/>
-              </a:lnSpc>
-              <a:buNone/>
-            </a:pPr>
             <a:r>
               <a:rPr lang="en-US" sz="1050" dirty="0">
                 <a:solidFill>
@@ -3420,6 +3390,185 @@
               </a:rPr>
               <a:t>我们学校有</a:t>
             </a:r>
+            <a:r>
+              <a:rPr lang="en-US" sz="1200" b="1" u="sng" dirty="0">
+                <a:solidFill>
+                  <a:srgbClr val="3A5F8A"/>
+                </a:solidFill>
+                <a:latin typeface="Noto Serif SC" pitchFamily="34" charset="0"/>
+                <a:ea typeface="Noto Serif SC" pitchFamily="34" charset="-122"/>
+                <a:cs typeface="Noto Serif SC" pitchFamily="34" charset="-120"/>
+              </a:rPr>
+              <a:t>__</a:t>
+            </a:r>
+            <a:r>
+              <a:rPr lang="en-US" sz="1200" dirty="0">
+                <a:solidFill>
+                  <a:srgbClr val="1A2535"/>
+                </a:solidFill>
+                <a:latin typeface="Noto Serif SC" pitchFamily="34" charset="0"/>
+                <a:ea typeface="Noto Serif SC" pitchFamily="34" charset="-122"/>
+                <a:cs typeface="Noto Serif SC" pitchFamily="34" charset="-120"/>
+              </a:rPr>
+              <a:t>幢教学楼、</a:t>
+            </a:r>
+            <a:r>
+              <a:rPr lang="en-US" sz="1200" b="1" u="sng" dirty="0">
+                <a:solidFill>
+                  <a:srgbClr val="3A5F8A"/>
+                </a:solidFill>
+                <a:latin typeface="Noto Serif SC" pitchFamily="34" charset="0"/>
+                <a:ea typeface="Noto Serif SC" pitchFamily="34" charset="-122"/>
+                <a:cs typeface="Noto Serif SC" pitchFamily="34" charset="-120"/>
+              </a:rPr>
+              <a:t>__</a:t>
+            </a:r>
+            <a:r>
+              <a:rPr lang="en-US" sz="1200" dirty="0">
+                <a:solidFill>
+                  <a:srgbClr val="1A2535"/>
+                </a:solidFill>
+                <a:latin typeface="Noto Serif SC" pitchFamily="34" charset="0"/>
+                <a:ea typeface="Noto Serif SC" pitchFamily="34" charset="-122"/>
+                <a:cs typeface="Noto Serif SC" pitchFamily="34" charset="-120"/>
+              </a:rPr>
+              <a:t>个</a:t>
+            </a:r>
+            <a:r>
+              <a:rPr lang="en-US" sz="1200" b="1" u="sng" dirty="0">
+                <a:solidFill>
+                  <a:srgbClr val="3A5F8A"/>
+                </a:solidFill>
+                <a:latin typeface="Noto Serif SC" pitchFamily="34" charset="0"/>
+                <a:ea typeface="Noto Serif SC" pitchFamily="34" charset="-122"/>
+                <a:cs typeface="Noto Serif SC" pitchFamily="34" charset="-120"/>
+              </a:rPr>
+              <a:t>__</a:t>
+            </a:r>
+            <a:r>
+              <a:rPr lang="en-US" sz="1200" dirty="0">
+                <a:solidFill>
+                  <a:srgbClr val="1A2535"/>
+                </a:solidFill>
+                <a:latin typeface="Noto Serif SC" pitchFamily="34" charset="0"/>
+                <a:ea typeface="Noto Serif SC" pitchFamily="34" charset="-122"/>
+                <a:cs typeface="Noto Serif SC" pitchFamily="34" charset="-120"/>
+              </a:rPr>
+              <a:t>、</a:t>
+            </a:r>
+            <a:r>
+              <a:rPr lang="en-US" sz="1200" b="1" u="sng" dirty="0">
+                <a:solidFill>
+                  <a:srgbClr val="3A5F8A"/>
+                </a:solidFill>
+                <a:latin typeface="Noto Serif SC" pitchFamily="34" charset="0"/>
+                <a:ea typeface="Noto Serif SC" pitchFamily="34" charset="-122"/>
+                <a:cs typeface="Noto Serif SC" pitchFamily="34" charset="-120"/>
+              </a:rPr>
+              <a:t>__</a:t>
+            </a:r>
+            <a:r>
+              <a:rPr lang="en-US" sz="1200" dirty="0">
+                <a:solidFill>
+                  <a:srgbClr val="1A2535"/>
+                </a:solidFill>
+                <a:latin typeface="Noto Serif SC" pitchFamily="34" charset="0"/>
+                <a:ea typeface="Noto Serif SC" pitchFamily="34" charset="-122"/>
+                <a:cs typeface="Noto Serif SC" pitchFamily="34" charset="-120"/>
+              </a:rPr>
+              <a:t>个</a:t>
+            </a:r>
+            <a:r>
+              <a:rPr lang="en-US" sz="1200" b="1" u="sng" dirty="0">
+                <a:solidFill>
+                  <a:srgbClr val="3A5F8A"/>
+                </a:solidFill>
+                <a:latin typeface="Noto Serif SC" pitchFamily="34" charset="0"/>
+                <a:ea typeface="Noto Serif SC" pitchFamily="34" charset="-122"/>
+                <a:cs typeface="Noto Serif SC" pitchFamily="34" charset="-120"/>
+              </a:rPr>
+              <a:t>__</a:t>
+            </a:r>
+            <a:r>
+              <a:rPr lang="en-US" sz="1200" dirty="0">
+                <a:solidFill>
+                  <a:srgbClr val="1A2535"/>
+                </a:solidFill>
+                <a:latin typeface="Noto Serif SC" pitchFamily="34" charset="0"/>
+                <a:ea typeface="Noto Serif SC" pitchFamily="34" charset="-122"/>
+                <a:cs typeface="Noto Serif SC" pitchFamily="34" charset="-120"/>
+              </a:rPr>
+              <a:t>和</a:t>
+            </a:r>
+            <a:r>
+              <a:rPr lang="en-US" sz="1200" b="1" u="sng" dirty="0">
+                <a:solidFill>
+                  <a:srgbClr val="3A5F8A"/>
+                </a:solidFill>
+                <a:latin typeface="Noto Serif SC" pitchFamily="34" charset="0"/>
+                <a:ea typeface="Noto Serif SC" pitchFamily="34" charset="-122"/>
+                <a:cs typeface="Noto Serif SC" pitchFamily="34" charset="-120"/>
+              </a:rPr>
+              <a:t>__</a:t>
+            </a:r>
+            <a:r>
+              <a:rPr lang="en-US" sz="1200" dirty="0">
+                <a:solidFill>
+                  <a:srgbClr val="1A2535"/>
+                </a:solidFill>
+                <a:latin typeface="Noto Serif SC" pitchFamily="34" charset="0"/>
+                <a:ea typeface="Noto Serif SC" pitchFamily="34" charset="-122"/>
+                <a:cs typeface="Noto Serif SC" pitchFamily="34" charset="-120"/>
+              </a:rPr>
+              <a:t>个</a:t>
+            </a:r>
+            <a:r>
+              <a:rPr lang="en-US" sz="1200" b="1" u="sng" dirty="0">
+                <a:solidFill>
+                  <a:srgbClr val="3A5F8A"/>
+                </a:solidFill>
+                <a:latin typeface="Noto Serif SC" pitchFamily="34" charset="0"/>
+                <a:ea typeface="Noto Serif SC" pitchFamily="34" charset="-122"/>
+                <a:cs typeface="Noto Serif SC" pitchFamily="34" charset="-120"/>
+              </a:rPr>
+              <a:t>__</a:t>
+            </a:r>
+            <a:r>
+              <a:rPr lang="en-US" sz="1200" dirty="0">
+                <a:solidFill>
+                  <a:srgbClr val="1A2535"/>
+                </a:solidFill>
+                <a:latin typeface="Noto Serif SC" pitchFamily="34" charset="0"/>
+                <a:ea typeface="Noto Serif SC" pitchFamily="34" charset="-122"/>
+                <a:cs typeface="Noto Serif SC" pitchFamily="34" charset="-120"/>
+              </a:rPr>
+              <a:t>。</a:t>
+            </a:r>
+            <a:endParaRPr lang="en-US" sz="1200" dirty="0"/>
+          </a:p>
+        </p:txBody>
+      </p:sp>
+      <p:sp>
+        <p:nvSpPr>
+          <p:cNvPr id="27" name="Text 25"/>
+          <p:cNvSpPr/>
+          <p:nvPr/>
+        </p:nvSpPr>
+        <p:spPr>
+          <a:xfrm>
+            <a:off x="711101" y="4108252"/>
+            <a:ext cx="5606451" cy="209550"/>
+          </a:xfrm>
+          <a:prstGeom prst="rect">
+            <a:avLst/>
+          </a:prstGeom>
+          <a:noFill/>
+          <a:ln/>
+        </p:spPr>
+        <p:txBody>
+          <a:bodyPr wrap="square" lIns="0" tIns="0" rIns="0" bIns="0" rtlCol="0" anchor="t"/>
+          <a:lstStyle/>
+          <a:p>
             <a:pPr algn="l" indent="0" marL="0">
               <a:spcAft>
                 <a:spcPts val="300"/>
@@ -3427,302 +3576,27 @@
               <a:buNone/>
             </a:pPr>
             <a:r>
-              <a:rPr lang="en-US" sz="1200" b="1" u="sng" dirty="0">
-                <a:solidFill>
-                  <a:srgbClr val="3A5F8A"/>
+              <a:rPr lang="en-US" sz="1200" dirty="0">
+                <a:solidFill>
+                  <a:srgbClr val="1A2535"/>
                 </a:solidFill>
                 <a:latin typeface="Noto Serif SC" pitchFamily="34" charset="0"/>
                 <a:ea typeface="Noto Serif SC" pitchFamily="34" charset="-122"/>
                 <a:cs typeface="Noto Serif SC" pitchFamily="34" charset="-120"/>
               </a:rPr>
-              <a:t>__</a:t>
-            </a:r>
-            <a:pPr algn="l" indent="0" marL="0">
-              <a:spcAft>
-                <a:spcPts val="300"/>
-              </a:spcAft>
-              <a:buNone/>
-            </a:pPr>
-            <a:r>
-              <a:rPr lang="en-US" sz="1200" dirty="0">
-                <a:solidFill>
-                  <a:srgbClr val="1A2535"/>
+              <a:t>我们学校还有一个</a:t>
+            </a:r>
+            <a:r>
+              <a:rPr lang="en-US" sz="1200" b="1" u="sng" dirty="0">
+                <a:solidFill>
+                  <a:srgbClr val="3A5F8A"/>
                 </a:solidFill>
                 <a:latin typeface="Noto Serif SC" pitchFamily="34" charset="0"/>
                 <a:ea typeface="Noto Serif SC" pitchFamily="34" charset="-122"/>
                 <a:cs typeface="Noto Serif SC" pitchFamily="34" charset="-120"/>
               </a:rPr>
-              <a:t>幢教学楼、</a:t>
-            </a:r>
-            <a:pPr algn="l" indent="0" marL="0">
-              <a:spcAft>
-                <a:spcPts val="300"/>
-              </a:spcAft>
-              <a:buNone/>
-            </a:pPr>
-            <a:r>
-              <a:rPr lang="en-US" sz="1200" b="1" u="sng" dirty="0">
-                <a:solidFill>
-                  <a:srgbClr val="3A5F8A"/>
-                </a:solidFill>
-                <a:latin typeface="Noto Serif SC" pitchFamily="34" charset="0"/>
-                <a:ea typeface="Noto Serif SC" pitchFamily="34" charset="-122"/>
-                <a:cs typeface="Noto Serif SC" pitchFamily="34" charset="-120"/>
-              </a:rPr>
               <a:t>__</a:t>
             </a:r>
-            <a:pPr algn="l" indent="0" marL="0">
-              <a:spcAft>
-                <a:spcPts val="300"/>
-              </a:spcAft>
-              <a:buNone/>
-            </a:pPr>
-            <a:r>
-              <a:rPr lang="en-US" sz="1200" dirty="0">
-                <a:solidFill>
-                  <a:srgbClr val="1A2535"/>
-                </a:solidFill>
-                <a:latin typeface="Noto Serif SC" pitchFamily="34" charset="0"/>
-                <a:ea typeface="Noto Serif SC" pitchFamily="34" charset="-122"/>
-                <a:cs typeface="Noto Serif SC" pitchFamily="34" charset="-120"/>
-              </a:rPr>
-              <a:t>个</a:t>
-            </a:r>
-            <a:pPr algn="l" indent="0" marL="0">
-              <a:spcAft>
-                <a:spcPts val="300"/>
-              </a:spcAft>
-              <a:buNone/>
-            </a:pPr>
-            <a:r>
-              <a:rPr lang="en-US" sz="1200" b="1" u="sng" dirty="0">
-                <a:solidFill>
-                  <a:srgbClr val="3A5F8A"/>
-                </a:solidFill>
-                <a:latin typeface="Noto Serif SC" pitchFamily="34" charset="0"/>
-                <a:ea typeface="Noto Serif SC" pitchFamily="34" charset="-122"/>
-                <a:cs typeface="Noto Serif SC" pitchFamily="34" charset="-120"/>
-              </a:rPr>
-              <a:t>__</a:t>
-            </a:r>
-            <a:pPr algn="l" indent="0" marL="0">
-              <a:spcAft>
-                <a:spcPts val="300"/>
-              </a:spcAft>
-              <a:buNone/>
-            </a:pPr>
-            <a:r>
-              <a:rPr lang="en-US" sz="1200" dirty="0">
-                <a:solidFill>
-                  <a:srgbClr val="1A2535"/>
-                </a:solidFill>
-                <a:latin typeface="Noto Serif SC" pitchFamily="34" charset="0"/>
-                <a:ea typeface="Noto Serif SC" pitchFamily="34" charset="-122"/>
-                <a:cs typeface="Noto Serif SC" pitchFamily="34" charset="-120"/>
-              </a:rPr>
-              <a:t>、</a:t>
-            </a:r>
-            <a:pPr algn="l" indent="0" marL="0">
-              <a:spcAft>
-                <a:spcPts val="300"/>
-              </a:spcAft>
-              <a:buNone/>
-            </a:pPr>
-            <a:r>
-              <a:rPr lang="en-US" sz="1200" b="1" u="sng" dirty="0">
-                <a:solidFill>
-                  <a:srgbClr val="3A5F8A"/>
-                </a:solidFill>
-                <a:latin typeface="Noto Serif SC" pitchFamily="34" charset="0"/>
-                <a:ea typeface="Noto Serif SC" pitchFamily="34" charset="-122"/>
-                <a:cs typeface="Noto Serif SC" pitchFamily="34" charset="-120"/>
-              </a:rPr>
-              <a:t>__</a:t>
-            </a:r>
-            <a:pPr algn="l" indent="0" marL="0">
-              <a:spcAft>
-                <a:spcPts val="300"/>
-              </a:spcAft>
-              <a:buNone/>
-            </a:pPr>
-            <a:r>
-              <a:rPr lang="en-US" sz="1200" dirty="0">
-                <a:solidFill>
-                  <a:srgbClr val="1A2535"/>
-                </a:solidFill>
-                <a:latin typeface="Noto Serif SC" pitchFamily="34" charset="0"/>
-                <a:ea typeface="Noto Serif SC" pitchFamily="34" charset="-122"/>
-                <a:cs typeface="Noto Serif SC" pitchFamily="34" charset="-120"/>
-              </a:rPr>
-              <a:t>个</a:t>
-            </a:r>
-            <a:pPr algn="l" indent="0" marL="0">
-              <a:spcAft>
-                <a:spcPts val="300"/>
-              </a:spcAft>
-              <a:buNone/>
-            </a:pPr>
-            <a:r>
-              <a:rPr lang="en-US" sz="1200" b="1" u="sng" dirty="0">
-                <a:solidFill>
-                  <a:srgbClr val="3A5F8A"/>
-                </a:solidFill>
-                <a:latin typeface="Noto Serif SC" pitchFamily="34" charset="0"/>
-                <a:ea typeface="Noto Serif SC" pitchFamily="34" charset="-122"/>
-                <a:cs typeface="Noto Serif SC" pitchFamily="34" charset="-120"/>
-              </a:rPr>
-              <a:t>__</a:t>
-            </a:r>
-            <a:pPr algn="l" indent="0" marL="0">
-              <a:spcAft>
-                <a:spcPts val="300"/>
-              </a:spcAft>
-              <a:buNone/>
-            </a:pPr>
-            <a:r>
-              <a:rPr lang="en-US" sz="1200" dirty="0">
-                <a:solidFill>
-                  <a:srgbClr val="1A2535"/>
-                </a:solidFill>
-                <a:latin typeface="Noto Serif SC" pitchFamily="34" charset="0"/>
-                <a:ea typeface="Noto Serif SC" pitchFamily="34" charset="-122"/>
-                <a:cs typeface="Noto Serif SC" pitchFamily="34" charset="-120"/>
-              </a:rPr>
-              <a:t>和</a:t>
-            </a:r>
-            <a:pPr algn="l" indent="0" marL="0">
-              <a:spcAft>
-                <a:spcPts val="300"/>
-              </a:spcAft>
-              <a:buNone/>
-            </a:pPr>
-            <a:r>
-              <a:rPr lang="en-US" sz="1200" b="1" u="sng" dirty="0">
-                <a:solidFill>
-                  <a:srgbClr val="3A5F8A"/>
-                </a:solidFill>
-                <a:latin typeface="Noto Serif SC" pitchFamily="34" charset="0"/>
-                <a:ea typeface="Noto Serif SC" pitchFamily="34" charset="-122"/>
-                <a:cs typeface="Noto Serif SC" pitchFamily="34" charset="-120"/>
-              </a:rPr>
-              <a:t>__</a:t>
-            </a:r>
-            <a:pPr algn="l" indent="0" marL="0">
-              <a:spcAft>
-                <a:spcPts val="300"/>
-              </a:spcAft>
-              <a:buNone/>
-            </a:pPr>
-            <a:r>
-              <a:rPr lang="en-US" sz="1200" dirty="0">
-                <a:solidFill>
-                  <a:srgbClr val="1A2535"/>
-                </a:solidFill>
-                <a:latin typeface="Noto Serif SC" pitchFamily="34" charset="0"/>
-                <a:ea typeface="Noto Serif SC" pitchFamily="34" charset="-122"/>
-                <a:cs typeface="Noto Serif SC" pitchFamily="34" charset="-120"/>
-              </a:rPr>
-              <a:t>个</a:t>
-            </a:r>
-            <a:pPr algn="l" indent="0" marL="0">
-              <a:spcAft>
-                <a:spcPts val="300"/>
-              </a:spcAft>
-              <a:buNone/>
-            </a:pPr>
-            <a:r>
-              <a:rPr lang="en-US" sz="1200" b="1" u="sng" dirty="0">
-                <a:solidFill>
-                  <a:srgbClr val="3A5F8A"/>
-                </a:solidFill>
-                <a:latin typeface="Noto Serif SC" pitchFamily="34" charset="0"/>
-                <a:ea typeface="Noto Serif SC" pitchFamily="34" charset="-122"/>
-                <a:cs typeface="Noto Serif SC" pitchFamily="34" charset="-120"/>
-              </a:rPr>
-              <a:t>__</a:t>
-            </a:r>
-            <a:pPr algn="l" indent="0" marL="0">
-              <a:spcAft>
-                <a:spcPts val="300"/>
-              </a:spcAft>
-              <a:buNone/>
-            </a:pPr>
-            <a:r>
-              <a:rPr lang="en-US" sz="1200" dirty="0">
-                <a:solidFill>
-                  <a:srgbClr val="1A2535"/>
-                </a:solidFill>
-                <a:latin typeface="Noto Serif SC" pitchFamily="34" charset="0"/>
-                <a:ea typeface="Noto Serif SC" pitchFamily="34" charset="-122"/>
-                <a:cs typeface="Noto Serif SC" pitchFamily="34" charset="-120"/>
-              </a:rPr>
-              <a:t>。</a:t>
-            </a:r>
-            <a:endParaRPr lang="en-US" sz="1200" dirty="0"/>
-          </a:p>
-        </p:txBody>
-      </p:sp>
-      <p:sp>
-        <p:nvSpPr>
-          <p:cNvPr id="27" name="Text 25"/>
-          <p:cNvSpPr/>
-          <p:nvPr/>
-        </p:nvSpPr>
-        <p:spPr>
-          <a:xfrm>
-            <a:off x="711101" y="4108252"/>
-            <a:ext cx="5606451" cy="209550"/>
-          </a:xfrm>
-          <a:prstGeom prst="rect">
-            <a:avLst/>
-          </a:prstGeom>
-          <a:noFill/>
-          <a:ln/>
-        </p:spPr>
-        <p:txBody>
-          <a:bodyPr wrap="square" lIns="0" tIns="0" rIns="0" bIns="0" rtlCol="0" anchor="t"/>
-          <a:lstStyle/>
-          <a:p>
-            <a:pPr algn="l" indent="0" marL="0">
-              <a:spcAft>
-                <a:spcPts val="300"/>
-              </a:spcAft>
-              <a:buNone/>
-            </a:pPr>
-            <a:r>
-              <a:rPr lang="en-US" sz="1200" dirty="0">
-                <a:solidFill>
-                  <a:srgbClr val="1A2535"/>
-                </a:solidFill>
-                <a:latin typeface="Noto Serif SC" pitchFamily="34" charset="0"/>
-                <a:ea typeface="Noto Serif SC" pitchFamily="34" charset="-122"/>
-                <a:cs typeface="Noto Serif SC" pitchFamily="34" charset="-120"/>
-              </a:rPr>
-              <a:t>我们学校还有一个</a:t>
-            </a:r>
-            <a:pPr algn="l" indent="0" marL="0">
-              <a:spcAft>
-                <a:spcPts val="300"/>
-              </a:spcAft>
-              <a:buNone/>
-            </a:pPr>
-            <a:r>
-              <a:rPr lang="en-US" sz="1200" b="1" u="sng" dirty="0">
-                <a:solidFill>
-                  <a:srgbClr val="3A5F8A"/>
-                </a:solidFill>
-                <a:latin typeface="Noto Serif SC" pitchFamily="34" charset="0"/>
-                <a:ea typeface="Noto Serif SC" pitchFamily="34" charset="-122"/>
-                <a:cs typeface="Noto Serif SC" pitchFamily="34" charset="-120"/>
-              </a:rPr>
-              <a:t>__</a:t>
-            </a:r>
-            <a:pPr algn="l" indent="0" marL="0">
-              <a:spcAft>
-                <a:spcPts val="300"/>
-              </a:spcAft>
-              <a:buNone/>
-            </a:pPr>
             <a:r>
               <a:rPr lang="en-US" sz="1200" dirty="0">
                 <a:solidFill>
@@ -5199,9 +5073,6 @@
               </a:rPr>
               <a:t>图书</a:t>
             </a:r>
-            <a:pPr algn="ctr" indent="0" marL="0">
-              <a:buNone/>
-            </a:pPr>
             <a:r>
               <a:rPr lang="en-US" sz="1600" b="1" dirty="0">
                 <a:solidFill>
@@ -5288,9 +5159,6 @@
               </a:rPr>
               <a:t>体育</a:t>
             </a:r>
-            <a:pPr algn="ctr" indent="0" marL="0">
-              <a:buNone/>
-            </a:pPr>
             <a:r>
               <a:rPr lang="en-US" sz="1600" b="1" dirty="0">
                 <a:solidFill>
@@ -5377,9 +5245,6 @@
               </a:rPr>
               <a:t>篮球</a:t>
             </a:r>
-            <a:pPr algn="ctr" indent="0" marL="0">
-              <a:buNone/>
-            </a:pPr>
             <a:r>
               <a:rPr lang="en-US" sz="1600" b="1" dirty="0">
                 <a:solidFill>
@@ -5466,9 +5331,6 @@
               </a:rPr>
               <a:t>足球</a:t>
             </a:r>
-            <a:pPr algn="ctr" indent="0" marL="0">
-              <a:buNone/>
-            </a:pPr>
             <a:r>
               <a:rPr lang="en-US" sz="1600" b="1" dirty="0">
                 <a:solidFill>
@@ -5555,9 +5417,6 @@
               </a:rPr>
               <a:t>停车</a:t>
             </a:r>
-            <a:pPr algn="ctr" indent="0" marL="0">
-              <a:buNone/>
-            </a:pPr>
             <a:r>
               <a:rPr lang="en-US" sz="1600" b="1" dirty="0">
                 <a:solidFill>
@@ -5644,9 +5503,6 @@
               </a:rPr>
               <a:t>游泳</a:t>
             </a:r>
-            <a:pPr algn="ctr" indent="0" marL="0">
-              <a:buNone/>
-            </a:pPr>
             <a:r>
               <a:rPr lang="en-US" sz="1600" b="1" dirty="0">
                 <a:solidFill>
@@ -5733,9 +5589,6 @@
               </a:rPr>
               <a:t>教学</a:t>
             </a:r>
-            <a:pPr algn="ctr" indent="0" marL="0">
-              <a:buNone/>
-            </a:pPr>
             <a:r>
               <a:rPr lang="en-US" sz="1600" b="1" dirty="0">
                 <a:solidFill>
@@ -5822,9 +5675,6 @@
               </a:rPr>
               <a:t>办公</a:t>
             </a:r>
-            <a:pPr algn="ctr" indent="0" marL="0">
-              <a:buNone/>
-            </a:pPr>
             <a:r>
               <a:rPr lang="en-US" sz="1600" b="1" dirty="0">
                 <a:solidFill>
@@ -5911,9 +5761,6 @@
               </a:rPr>
               <a:t>实验</a:t>
             </a:r>
-            <a:pPr algn="ctr" indent="0" marL="0">
-              <a:buNone/>
-            </a:pPr>
             <a:r>
               <a:rPr lang="en-US" sz="1600" b="1" dirty="0">
                 <a:solidFill>
@@ -6000,9 +5847,6 @@
               </a:rPr>
               <a:t>音乐</a:t>
             </a:r>
-            <a:pPr algn="ctr" indent="0" marL="0">
-              <a:buNone/>
-            </a:pPr>
             <a:r>
               <a:rPr lang="en-US" sz="1600" b="1" dirty="0">
                 <a:solidFill>
@@ -6089,9 +5933,6 @@
               </a:rPr>
               <a:t>校医</a:t>
             </a:r>
-            <a:pPr algn="ctr" indent="0" marL="0">
-              <a:buNone/>
-            </a:pPr>
             <a:r>
               <a:rPr lang="en-US" sz="1600" b="1" dirty="0">
                 <a:solidFill>
@@ -6178,9 +6019,6 @@
               </a:rPr>
               <a:t>校长</a:t>
             </a:r>
-            <a:pPr algn="ctr" indent="0" marL="0">
-              <a:buNone/>
-            </a:pPr>
             <a:r>
               <a:rPr lang="en-US" sz="1600" b="1" dirty="0">
                 <a:solidFill>
@@ -6842,12 +6680,6 @@
               </a:rPr>
               <a:t>If a team is stuck, teacher may reveal the </a:t>
             </a:r>
-            <a:pPr algn="l" indent="0" marL="0">
-              <a:lnSpc>
-                <a:spcPts val="1330"/>
-              </a:lnSpc>
-              <a:buNone/>
-            </a:pPr>
             <a:r>
               <a:rPr lang="en-US" sz="950" b="1" dirty="0">
                 <a:solidFill>
@@ -6859,12 +6691,6 @@
               </a:rPr>
               <a:t>first character</a:t>
             </a:r>
-            <a:pPr algn="l" indent="0" marL="0">
-              <a:lnSpc>
-                <a:spcPts val="1330"/>
-              </a:lnSpc>
-              <a:buNone/>
-            </a:pPr>
             <a:r>
               <a:rPr lang="en-US" sz="950" dirty="0">
                 <a:solidFill>
@@ -6996,12 +6822,6 @@
               </a:rPr>
               <a:t>Once a team wins a round, one member must use the compound word in a </a:t>
             </a:r>
-            <a:pPr algn="l" indent="0" marL="0">
-              <a:lnSpc>
-                <a:spcPts val="1330"/>
-              </a:lnSpc>
-              <a:buNone/>
-            </a:pPr>
             <a:r>
               <a:rPr lang="en-US" sz="950" b="1" dirty="0">
                 <a:solidFill>
@@ -7013,12 +6833,6 @@
               </a:rPr>
               <a:t>full sentence</a:t>
             </a:r>
-            <a:pPr algn="l" indent="0" marL="0">
-              <a:lnSpc>
-                <a:spcPts val="1330"/>
-              </a:lnSpc>
-              <a:buNone/>
-            </a:pPr>
             <a:r>
               <a:rPr lang="en-US" sz="950" dirty="0">
                 <a:solidFill>
@@ -7552,9 +7366,6 @@
               </a:rPr>
               <a:t>Hold up fingers: </a:t>
             </a:r>
-            <a:pPr algn="l" indent="0" marL="0">
-              <a:buNone/>
-            </a:pPr>
             <a:r>
               <a:rPr lang="en-US" sz="950" b="1" dirty="0">
                 <a:solidFill>
@@ -7566,9 +7377,6 @@
               </a:rPr>
               <a:t>3</a:t>
             </a:r>
-            <a:pPr algn="l" indent="0" marL="0">
-              <a:buNone/>
-            </a:pPr>
             <a:r>
               <a:rPr lang="en-US" sz="950" dirty="0">
                 <a:solidFill>
@@ -7580,9 +7388,6 @@
               </a:rPr>
               <a:t> = 完全可以 · </a:t>
             </a:r>
-            <a:pPr algn="l" indent="0" marL="0">
-              <a:buNone/>
-            </a:pPr>
             <a:r>
               <a:rPr lang="en-US" sz="950" b="1" dirty="0">
                 <a:solidFill>
@@ -7594,9 +7399,6 @@
               </a:rPr>
               <a:t>2</a:t>
             </a:r>
-            <a:pPr algn="l" indent="0" marL="0">
-              <a:buNone/>
-            </a:pPr>
             <a:r>
               <a:rPr lang="en-US" sz="950" dirty="0">
                 <a:solidFill>
@@ -7608,9 +7410,6 @@
               </a:rPr>
               <a:t> = 差不多 · </a:t>
             </a:r>
-            <a:pPr algn="l" indent="0" marL="0">
-              <a:buNone/>
-            </a:pPr>
             <a:r>
               <a:rPr lang="en-US" sz="950" b="1" dirty="0">
                 <a:solidFill>
@@ -7622,9 +7421,6 @@
               </a:rPr>
               <a:t>1</a:t>
             </a:r>
-            <a:pPr algn="l" indent="0" marL="0">
-              <a:buNone/>
-            </a:pPr>
             <a:r>
               <a:rPr lang="en-US" sz="950" dirty="0">
                 <a:solidFill>
@@ -7854,9 +7650,6 @@
               </a:rPr>
               <a:t>Note any students showing 1 finger on </a:t>
             </a:r>
-            <a:pPr algn="l" indent="0" marL="0">
-              <a:buNone/>
-            </a:pPr>
             <a:r>
               <a:rPr lang="en-US" sz="950" b="1" dirty="0">
                 <a:solidFill>
@@ -7868,9 +7661,6 @@
               </a:rPr>
               <a:t>word-building (criterion 1)</a:t>
             </a:r>
-            <a:pPr algn="l" indent="0" marL="0">
-              <a:buNone/>
-            </a:pPr>
             <a:r>
               <a:rPr lang="en-US" sz="950" dirty="0">
                 <a:solidFill>
@@ -8649,12 +8439,6 @@
               </a:rPr>
               <a:t>下一课，我们要正式学习 </a:t>
             </a:r>
-            <a:pPr algn="ctr" indent="0" marL="0">
-              <a:lnSpc>
-                <a:spcPts val="2560"/>
-              </a:lnSpc>
-              <a:buNone/>
-            </a:pPr>
             <a:r>
               <a:rPr lang="en-US" sz="1600" b="1" dirty="0">
                 <a:solidFill>
@@ -8666,12 +8450,6 @@
               </a:rPr>
               <a:t>教室</a:t>
             </a:r>
-            <a:pPr algn="ctr" indent="0" marL="0">
-              <a:lnSpc>
-                <a:spcPts val="2560"/>
-              </a:lnSpc>
-              <a:buNone/>
-            </a:pPr>
             <a:r>
               <a:rPr lang="en-US" sz="1600" dirty="0">
                 <a:solidFill>
@@ -8683,12 +8461,6 @@
               </a:rPr>
               <a:t>、</a:t>
             </a:r>
-            <a:pPr algn="ctr" indent="0" marL="0">
-              <a:lnSpc>
-                <a:spcPts val="2560"/>
-              </a:lnSpc>
-              <a:buNone/>
-            </a:pPr>
             <a:r>
               <a:rPr lang="en-US" sz="1600" b="1" dirty="0">
                 <a:solidFill>
@@ -8700,12 +8472,6 @@
               </a:rPr>
               <a:t>实验室</a:t>
             </a:r>
-            <a:pPr algn="ctr" indent="0" marL="0">
-              <a:lnSpc>
-                <a:spcPts val="2560"/>
-              </a:lnSpc>
-              <a:buNone/>
-            </a:pPr>
             <a:r>
               <a:rPr lang="en-US" sz="1600" dirty="0">
                 <a:solidFill>
@@ -10245,12 +10011,6 @@
               </a:rPr>
               <a:t>Class </a:t>
             </a:r>
-            <a:pPr algn="l" indent="0" marL="0">
-              <a:lnSpc>
-                <a:spcPts val="1450"/>
-              </a:lnSpc>
-              <a:buNone/>
-            </a:pPr>
             <a:r>
               <a:rPr lang="en-US" sz="1000" b="1" dirty="0">
                 <a:solidFill>
@@ -10262,12 +10022,6 @@
               </a:rPr>
               <a:t>chorally names</a:t>
             </a:r>
-            <a:pPr algn="l" indent="0" marL="0">
-              <a:lnSpc>
-                <a:spcPts val="1450"/>
-              </a:lnSpc>
-              <a:buNone/>
-            </a:pPr>
             <a:r>
               <a:rPr lang="en-US" sz="1000" dirty="0">
                 <a:solidFill>
@@ -10279,12 +10033,6 @@
               </a:rPr>
               <a:t> each word in Chinese, then a </a:t>
             </a:r>
-            <a:pPr algn="l" indent="0" marL="0">
-              <a:lnSpc>
-                <a:spcPts val="1450"/>
-              </a:lnSpc>
-              <a:buNone/>
-            </a:pPr>
             <a:r>
               <a:rPr lang="en-US" sz="1000" b="1" dirty="0">
                 <a:solidFill>
@@ -10296,12 +10044,6 @@
               </a:rPr>
               <a:t>cold-call student</a:t>
             </a:r>
-            <a:pPr algn="l" indent="0" marL="0">
-              <a:lnSpc>
-                <a:spcPts val="1450"/>
-              </a:lnSpc>
-              <a:buNone/>
-            </a:pPr>
             <a:r>
               <a:rPr lang="en-US" sz="1000" dirty="0">
                 <a:solidFill>
@@ -10501,9 +10243,6 @@
               </a:rPr>
               <a:t>我们学校有五</a:t>
             </a:r>
-            <a:pPr algn="l" indent="0" marL="0">
-              <a:buNone/>
-            </a:pPr>
             <a:r>
               <a:rPr lang="en-US" sz="1500" b="1" u="sng" dirty="0">
                 <a:solidFill>
@@ -10515,9 +10254,6 @@
               </a:rPr>
               <a:t>个</a:t>
             </a:r>
-            <a:pPr algn="l" indent="0" marL="0">
-              <a:buNone/>
-            </a:pPr>
             <a:r>
               <a:rPr lang="en-US" sz="1500" dirty="0">
                 <a:solidFill>
@@ -10642,9 +10378,6 @@
               </a:rPr>
               <a:t>学校有一</a:t>
             </a:r>
-            <a:pPr algn="l" indent="0" marL="0">
-              <a:buNone/>
-            </a:pPr>
             <a:r>
               <a:rPr lang="en-US" sz="1500" b="1" u="sng" dirty="0">
                 <a:solidFill>
@@ -10656,9 +10389,6 @@
               </a:rPr>
               <a:t>幢</a:t>
             </a:r>
-            <a:pPr algn="l" indent="0" marL="0">
-              <a:buNone/>
-            </a:pPr>
             <a:r>
               <a:rPr lang="en-US" sz="1500" dirty="0">
                 <a:solidFill>
@@ -10783,9 +10513,6 @@
               </a:rPr>
               <a:t>我们学校有一个篮球场和一</a:t>
             </a:r>
-            <a:pPr algn="l" indent="0" marL="0">
-              <a:buNone/>
-            </a:pPr>
             <a:r>
               <a:rPr lang="en-US" sz="1500" b="1" u="sng" dirty="0">
                 <a:solidFill>
@@ -10797,9 +10524,6 @@
               </a:rPr>
               <a:t>场</a:t>
             </a:r>
-            <a:pPr algn="l" indent="0" marL="0">
-              <a:buNone/>
-            </a:pPr>
             <a:r>
               <a:rPr lang="en-US" sz="1500" dirty="0">
                 <a:solidFill>
@@ -10979,12 +10703,6 @@
               </a:rPr>
               <a:t>上节课我们学了</a:t>
             </a:r>
-            <a:pPr algn="l" indent="0" marL="0">
-              <a:lnSpc>
-                <a:spcPts val="1650"/>
-              </a:lnSpc>
-              <a:buNone/>
-            </a:pPr>
             <a:r>
               <a:rPr lang="en-US" sz="1100" b="1" dirty="0">
                 <a:solidFill>
@@ -10996,12 +10714,6 @@
               </a:rPr>
               <a:t>图书馆</a:t>
             </a:r>
-            <a:pPr algn="l" indent="0" marL="0">
-              <a:lnSpc>
-                <a:spcPts val="1650"/>
-              </a:lnSpc>
-              <a:buNone/>
-            </a:pPr>
             <a:r>
               <a:rPr lang="en-US" sz="1100" dirty="0">
                 <a:solidFill>
@@ -11013,12 +10725,6 @@
               </a:rPr>
               <a:t>、</a:t>
             </a:r>
-            <a:pPr algn="l" indent="0" marL="0">
-              <a:lnSpc>
-                <a:spcPts val="1650"/>
-              </a:lnSpc>
-              <a:buNone/>
-            </a:pPr>
             <a:r>
               <a:rPr lang="en-US" sz="1100" b="1" dirty="0">
                 <a:solidFill>
@@ -11030,12 +10736,6 @@
               </a:rPr>
               <a:t>体育馆</a:t>
             </a:r>
-            <a:pPr algn="l" indent="0" marL="0">
-              <a:lnSpc>
-                <a:spcPts val="1650"/>
-              </a:lnSpc>
-              <a:buNone/>
-            </a:pPr>
             <a:r>
               <a:rPr lang="en-US" sz="1100" dirty="0">
                 <a:solidFill>
@@ -11526,9 +11226,6 @@
               </a:rPr>
               <a:t>我们学校有五</a:t>
             </a:r>
-            <a:pPr algn="l" indent="0" marL="0">
-              <a:buNone/>
-            </a:pPr>
             <a:r>
               <a:rPr lang="en-US" sz="1100" dirty="0">
                 <a:solidFill>
@@ -11540,9 +11237,6 @@
               </a:rPr>
               <a:t>个</a:t>
             </a:r>
-            <a:pPr algn="l" indent="0" marL="0">
-              <a:buNone/>
-            </a:pPr>
             <a:r>
               <a:rPr lang="en-US" sz="1100" dirty="0">
                 <a:solidFill>
@@ -11629,9 +11323,6 @@
               </a:rPr>
               <a:t>✅ 五</a:t>
             </a:r>
-            <a:pPr algn="l" indent="0" marL="0">
-              <a:buNone/>
-            </a:pPr>
             <a:r>
               <a:rPr lang="en-US" sz="1800" b="1" u="sng" dirty="0">
                 <a:solidFill>
@@ -11643,9 +11334,6 @@
               </a:rPr>
               <a:t>幢</a:t>
             </a:r>
-            <a:pPr algn="l" indent="0" marL="0">
-              <a:buNone/>
-            </a:pPr>
             <a:r>
               <a:rPr lang="en-US" sz="1800" dirty="0">
                 <a:solidFill>
@@ -11699,12 +11387,6 @@
               </a:rPr>
               <a:t>个 → </a:t>
             </a:r>
-            <a:pPr algn="l" indent="0" marL="0">
-              <a:spcBef>
-                <a:spcPts val="400"/>
-              </a:spcBef>
-              <a:buNone/>
-            </a:pPr>
             <a:r>
               <a:rPr lang="en-US" sz="1000" b="1" dirty="0">
                 <a:solidFill>
@@ -11716,12 +11398,6 @@
               </a:rPr>
               <a:t>幢</a:t>
             </a:r>
-            <a:pPr algn="l" indent="0" marL="0">
-              <a:spcBef>
-                <a:spcPts val="400"/>
-              </a:spcBef>
-              <a:buNone/>
-            </a:pPr>
             <a:r>
               <a:rPr lang="en-US" sz="1000" dirty="0">
                 <a:solidFill>
@@ -11879,9 +11555,6 @@
               </a:rPr>
               <a:t>学校有一</a:t>
             </a:r>
-            <a:pPr algn="l" indent="0" marL="0">
-              <a:buNone/>
-            </a:pPr>
             <a:r>
               <a:rPr lang="en-US" sz="1100" dirty="0">
                 <a:solidFill>
@@ -11893,9 +11566,6 @@
               </a:rPr>
               <a:t>幢</a:t>
             </a:r>
-            <a:pPr algn="l" indent="0" marL="0">
-              <a:buNone/>
-            </a:pPr>
             <a:r>
               <a:rPr lang="en-US" sz="1100" dirty="0">
                 <a:solidFill>
@@ -11982,9 +11652,6 @@
               </a:rPr>
               <a:t>✅ 一</a:t>
             </a:r>
-            <a:pPr algn="l" indent="0" marL="0">
-              <a:buNone/>
-            </a:pPr>
             <a:r>
               <a:rPr lang="en-US" sz="1800" b="1" u="sng" dirty="0">
                 <a:solidFill>
@@ -11996,9 +11663,6 @@
               </a:rPr>
               <a:t>个</a:t>
             </a:r>
-            <a:pPr algn="l" indent="0" marL="0">
-              <a:buNone/>
-            </a:pPr>
             <a:r>
               <a:rPr lang="en-US" sz="1800" dirty="0">
                 <a:solidFill>
@@ -12052,12 +11716,6 @@
               </a:rPr>
               <a:t>幢 → </a:t>
             </a:r>
-            <a:pPr algn="l" indent="0" marL="0">
-              <a:spcBef>
-                <a:spcPts val="400"/>
-              </a:spcBef>
-              <a:buNone/>
-            </a:pPr>
             <a:r>
               <a:rPr lang="en-US" sz="1000" b="1" dirty="0">
                 <a:solidFill>
@@ -12069,12 +11727,6 @@
               </a:rPr>
               <a:t>个</a:t>
             </a:r>
-            <a:pPr algn="l" indent="0" marL="0">
-              <a:spcBef>
-                <a:spcPts val="400"/>
-              </a:spcBef>
-              <a:buNone/>
-            </a:pPr>
             <a:r>
               <a:rPr lang="en-US" sz="1000" dirty="0">
                 <a:solidFill>
@@ -12232,9 +11884,6 @@
               </a:rPr>
               <a:t>我们学校有一个篮球场和一</a:t>
             </a:r>
-            <a:pPr algn="l" indent="0" marL="0">
-              <a:buNone/>
-            </a:pPr>
             <a:r>
               <a:rPr lang="en-US" sz="1100" dirty="0">
                 <a:solidFill>
@@ -12246,9 +11895,6 @@
               </a:rPr>
               <a:t>场</a:t>
             </a:r>
-            <a:pPr algn="l" indent="0" marL="0">
-              <a:buNone/>
-            </a:pPr>
             <a:r>
               <a:rPr lang="en-US" sz="1100" dirty="0">
                 <a:solidFill>
@@ -12335,9 +11981,6 @@
               </a:rPr>
               <a:t>✅ 一</a:t>
             </a:r>
-            <a:pPr algn="l" indent="0" marL="0">
-              <a:buNone/>
-            </a:pPr>
             <a:r>
               <a:rPr lang="en-US" sz="1800" b="1" u="sng" dirty="0">
                 <a:solidFill>
@@ -12349,9 +11992,6 @@
               </a:rPr>
               <a:t>个</a:t>
             </a:r>
-            <a:pPr algn="l" indent="0" marL="0">
-              <a:buNone/>
-            </a:pPr>
             <a:r>
               <a:rPr lang="en-US" sz="1800" dirty="0">
                 <a:solidFill>
@@ -12405,12 +12045,6 @@
               </a:rPr>
               <a:t>场 → </a:t>
             </a:r>
-            <a:pPr algn="l" indent="0" marL="0">
-              <a:spcBef>
-                <a:spcPts val="400"/>
-              </a:spcBef>
-              <a:buNone/>
-            </a:pPr>
             <a:r>
               <a:rPr lang="en-US" sz="1000" b="1" dirty="0">
                 <a:solidFill>
@@ -12422,12 +12056,6 @@
               </a:rPr>
               <a:t>个</a:t>
             </a:r>
-            <a:pPr algn="l" indent="0" marL="0">
-              <a:spcBef>
-                <a:spcPts val="400"/>
-              </a:spcBef>
-              <a:buNone/>
-            </a:pPr>
             <a:r>
               <a:rPr lang="en-US" sz="1000" dirty="0">
                 <a:solidFill>
@@ -12912,12 +12540,6 @@
               </a:rPr>
               <a:t>We are learning to </a:t>
             </a:r>
-            <a:pPr algn="l" indent="0" marL="0">
-              <a:lnSpc>
-                <a:spcPts val="2175"/>
-              </a:lnSpc>
-              <a:buNone/>
-            </a:pPr>
             <a:r>
               <a:rPr lang="en-US" sz="1500" b="1" dirty="0">
                 <a:solidFill>
@@ -12929,12 +12551,6 @@
               </a:rPr>
               <a:t>build compound facility/room words</a:t>
             </a:r>
-            <a:pPr algn="l" indent="0" marL="0">
-              <a:lnSpc>
-                <a:spcPts val="2175"/>
-              </a:lnSpc>
-              <a:buNone/>
-            </a:pPr>
             <a:r>
               <a:rPr lang="en-US" sz="1500" dirty="0">
                 <a:solidFill>
@@ -12946,12 +12562,6 @@
               </a:rPr>
               <a:t> from base characters and </a:t>
             </a:r>
-            <a:pPr algn="l" indent="0" marL="0">
-              <a:lnSpc>
-                <a:spcPts val="2175"/>
-              </a:lnSpc>
-              <a:buNone/>
-            </a:pPr>
             <a:r>
               <a:rPr lang="en-US" sz="1500" b="1" dirty="0">
                 <a:solidFill>
@@ -12963,12 +12573,6 @@
               </a:rPr>
               <a:t>describe our school's layout</a:t>
             </a:r>
-            <a:pPr algn="l" indent="0" marL="0">
-              <a:lnSpc>
-                <a:spcPts val="2175"/>
-              </a:lnSpc>
-              <a:buNone/>
-            </a:pPr>
             <a:r>
               <a:rPr lang="en-US" sz="1500" dirty="0">
                 <a:solidFill>
@@ -13097,12 +12701,6 @@
               </a:rPr>
               <a:t>I can combine base characters with </a:t>
             </a:r>
-            <a:pPr algn="l" indent="0" marL="0">
-              <a:lnSpc>
-                <a:spcPts val="1820"/>
-              </a:lnSpc>
-              <a:buNone/>
-            </a:pPr>
             <a:r>
               <a:rPr lang="en-US" sz="1300" b="1" dirty="0">
                 <a:solidFill>
@@ -13114,12 +12712,6 @@
               </a:rPr>
               <a:t>馆/场/池/楼/室</a:t>
             </a:r>
-            <a:pPr algn="l" indent="0" marL="0">
-              <a:lnSpc>
-                <a:spcPts val="1820"/>
-              </a:lnSpc>
-              <a:buNone/>
-            </a:pPr>
             <a:r>
               <a:rPr lang="en-US" sz="1300" dirty="0">
                 <a:solidFill>
@@ -13290,12 +12882,6 @@
               </a:rPr>
               <a:t>I can describe a school map using </a:t>
             </a:r>
-            <a:pPr algn="l" indent="0" marL="0">
-              <a:lnSpc>
-                <a:spcPts val="1820"/>
-              </a:lnSpc>
-              <a:buNone/>
-            </a:pPr>
             <a:r>
               <a:rPr lang="en-US" sz="1300" b="1" dirty="0">
                 <a:solidFill>
@@ -13307,12 +12893,6 @@
               </a:rPr>
               <a:t>我们学校有……</a:t>
             </a:r>
-            <a:pPr algn="l" indent="0" marL="0">
-              <a:lnSpc>
-                <a:spcPts val="1820"/>
-              </a:lnSpc>
-              <a:buNone/>
-            </a:pPr>
             <a:r>
               <a:rPr lang="en-US" sz="1300" dirty="0">
                 <a:solidFill>
@@ -13483,12 +13063,6 @@
               </a:rPr>
               <a:t>I can identify measure word errors (</a:t>
             </a:r>
-            <a:pPr algn="l" indent="0" marL="0">
-              <a:lnSpc>
-                <a:spcPts val="1820"/>
-              </a:lnSpc>
-              <a:buNone/>
-            </a:pPr>
             <a:r>
               <a:rPr lang="en-US" sz="1300" b="1" dirty="0">
                 <a:solidFill>
@@ -13500,12 +13074,6 @@
               </a:rPr>
               <a:t>个/幢</a:t>
             </a:r>
-            <a:pPr algn="l" indent="0" marL="0">
-              <a:lnSpc>
-                <a:spcPts val="1820"/>
-              </a:lnSpc>
-              <a:buNone/>
-            </a:pPr>
             <a:r>
               <a:rPr lang="en-US" sz="1300" dirty="0">
                 <a:solidFill>
@@ -15146,12 +14714,6 @@
               </a:rPr>
               <a:t>"如果我知道</a:t>
             </a:r>
-            <a:pPr algn="l" indent="0" marL="0">
-              <a:lnSpc>
-                <a:spcPts val="1800"/>
-              </a:lnSpc>
-              <a:buNone/>
-            </a:pPr>
             <a:r>
               <a:rPr lang="en-US" sz="1200" b="1" dirty="0">
                 <a:solidFill>
@@ -15163,12 +14725,6 @@
               </a:rPr>
               <a:t>办公</a:t>
             </a:r>
-            <a:pPr algn="l" indent="0" marL="0">
-              <a:lnSpc>
-                <a:spcPts val="1800"/>
-              </a:lnSpc>
-              <a:buNone/>
-            </a:pPr>
             <a:r>
               <a:rPr lang="en-US" sz="1200" dirty="0">
                 <a:solidFill>
@@ -15180,12 +14736,6 @@
               </a:rPr>
               <a:t>是'work'的意思，</a:t>
             </a:r>
-            <a:pPr algn="l" indent="0" marL="0">
-              <a:lnSpc>
-                <a:spcPts val="1800"/>
-              </a:lnSpc>
-              <a:buNone/>
-            </a:pPr>
             <a:r>
               <a:rPr lang="en-US" sz="1200" b="1" dirty="0">
                 <a:solidFill>
@@ -15197,12 +14747,6 @@
               </a:rPr>
               <a:t>室</a:t>
             </a:r>
-            <a:pPr algn="l" indent="0" marL="0">
-              <a:lnSpc>
-                <a:spcPts val="1800"/>
-              </a:lnSpc>
-              <a:buNone/>
-            </a:pPr>
             <a:r>
               <a:rPr lang="en-US" sz="1200" dirty="0">
                 <a:solidFill>
@@ -15214,12 +14758,6 @@
               </a:rPr>
               <a:t>是'room'，那么</a:t>
             </a:r>
-            <a:pPr algn="l" indent="0" marL="0">
-              <a:lnSpc>
-                <a:spcPts val="1800"/>
-              </a:lnSpc>
-              <a:buNone/>
-            </a:pPr>
             <a:r>
               <a:rPr lang="en-US" sz="1200" b="1" dirty="0">
                 <a:solidFill>
@@ -15231,12 +14769,6 @@
               </a:rPr>
               <a:t>办公+室=办公室</a:t>
             </a:r>
-            <a:pPr algn="l" indent="0" marL="0">
-              <a:lnSpc>
-                <a:spcPts val="1800"/>
-              </a:lnSpc>
-              <a:buNone/>
-            </a:pPr>
             <a:r>
               <a:rPr lang="en-US" sz="1200" dirty="0">
                 <a:solidFill>
@@ -16093,12 +15625,6 @@
               </a:rPr>
               <a:t>STRUCTURE </a:t>
             </a:r>
-            <a:pPr algn="l" indent="0" marL="0">
-              <a:spcAft>
-                <a:spcPts val="800"/>
-              </a:spcAft>
-              <a:buNone/>
-            </a:pPr>
             <a:r>
               <a:rPr lang="en-US" sz="900" b="1" dirty="0">
                 <a:solidFill>
@@ -16149,9 +15675,6 @@
               </a:rPr>
               <a:t>我来介绍一下我们学校。我们学校有</a:t>
             </a:r>
-            <a:pPr algn="l" indent="0" marL="0">
-              <a:buNone/>
-            </a:pPr>
             <a:r>
               <a:rPr lang="en-US" sz="3000" b="1" dirty="0">
                 <a:solidFill>
@@ -16957,12 +16480,6 @@
               </a:rPr>
               <a:t>"如果</a:t>
             </a:r>
-            <a:pPr algn="l" indent="0" marL="0">
-              <a:lnSpc>
-                <a:spcPts val="1575"/>
-              </a:lnSpc>
-              <a:buNone/>
-            </a:pPr>
             <a:r>
               <a:rPr lang="en-US" sz="1050" b="1" dirty="0">
                 <a:solidFill>
@@ -16974,12 +16491,6 @@
               </a:rPr>
               <a:t>'教学'</a:t>
             </a:r>
-            <a:pPr algn="l" indent="0" marL="0">
-              <a:lnSpc>
-                <a:spcPts val="1575"/>
-              </a:lnSpc>
-              <a:buNone/>
-            </a:pPr>
             <a:r>
               <a:rPr lang="en-US" sz="1050" dirty="0">
                 <a:solidFill>
@@ -16991,12 +16502,6 @@
               </a:rPr>
               <a:t>是'teaching'的意思，</a:t>
             </a:r>
-            <a:pPr algn="l" indent="0" marL="0">
-              <a:lnSpc>
-                <a:spcPts val="1575"/>
-              </a:lnSpc>
-              <a:buNone/>
-            </a:pPr>
             <a:r>
               <a:rPr lang="en-US" sz="1050" b="1" dirty="0">
                 <a:solidFill>
@@ -17008,12 +16513,6 @@
               </a:rPr>
               <a:t>'楼'</a:t>
             </a:r>
-            <a:pPr algn="l" indent="0" marL="0">
-              <a:lnSpc>
-                <a:spcPts val="1575"/>
-              </a:lnSpc>
-              <a:buNone/>
-            </a:pPr>
             <a:r>
               <a:rPr lang="en-US" sz="1050" dirty="0">
                 <a:solidFill>
@@ -17325,12 +16824,6 @@
               </a:rPr>
               <a:t>"Sam, 如果我们把</a:t>
             </a:r>
-            <a:pPr algn="l" indent="0" marL="0">
-              <a:lnSpc>
-                <a:spcPts val="1575"/>
-              </a:lnSpc>
-              <a:buNone/>
-            </a:pPr>
             <a:r>
               <a:rPr lang="en-US" sz="1050" b="1" dirty="0">
                 <a:solidFill>
@@ -17342,12 +16835,6 @@
               </a:rPr>
               <a:t>'校医'</a:t>
             </a:r>
-            <a:pPr algn="l" indent="0" marL="0">
-              <a:lnSpc>
-                <a:spcPts val="1575"/>
-              </a:lnSpc>
-              <a:buNone/>
-            </a:pPr>
             <a:r>
               <a:rPr lang="en-US" sz="1050" dirty="0">
                 <a:solidFill>
@@ -17359,12 +16846,6 @@
               </a:rPr>
               <a:t>（school doctor）加上</a:t>
             </a:r>
-            <a:pPr algn="l" indent="0" marL="0">
-              <a:lnSpc>
-                <a:spcPts val="1575"/>
-              </a:lnSpc>
-              <a:buNone/>
-            </a:pPr>
             <a:r>
               <a:rPr lang="en-US" sz="1050" b="1" dirty="0">
                 <a:solidFill>
@@ -17376,12 +16857,6 @@
               </a:rPr>
               <a:t>'室'</a:t>
             </a:r>
-            <a:pPr algn="l" indent="0" marL="0">
-              <a:lnSpc>
-                <a:spcPts val="1575"/>
-              </a:lnSpc>
-              <a:buNone/>
-            </a:pPr>
             <a:r>
               <a:rPr lang="en-US" sz="1050" dirty="0">
                 <a:solidFill>
@@ -17841,9 +17316,6 @@
               </a:rPr>
               <a:t>Teacher note:</a:t>
             </a:r>
-            <a:pPr algn="l" indent="0" marL="0">
-              <a:buNone/>
-            </a:pPr>
             <a:r>
               <a:rPr lang="en-US" sz="1050" dirty="0">
                 <a:solidFill>
@@ -18409,9 +17881,6 @@
               </a:rPr>
               <a:t>✅ </a:t>
             </a:r>
-            <a:pPr algn="l" indent="0" marL="0">
-              <a:buNone/>
-            </a:pPr>
             <a:r>
               <a:rPr lang="en-US" sz="1700" b="1" dirty="0">
                 <a:solidFill>
@@ -18423,9 +17892,6 @@
               </a:rPr>
               <a:t>教学楼</a:t>
             </a:r>
-            <a:pPr algn="l" indent="0" marL="0">
-              <a:buNone/>
-            </a:pPr>
             <a:r>
               <a:rPr lang="en-US" sz="1700" dirty="0">
                 <a:solidFill>
@@ -18658,9 +18124,6 @@
               </a:rPr>
               <a:t>✅ </a:t>
             </a:r>
-            <a:pPr algn="l" indent="0" marL="0">
-              <a:buNone/>
-            </a:pPr>
             <a:r>
               <a:rPr lang="en-US" sz="1700" b="1" dirty="0">
                 <a:solidFill>
@@ -18672,9 +18135,6 @@
               </a:rPr>
               <a:t>校医室</a:t>
             </a:r>
-            <a:pPr algn="l" indent="0" marL="0">
-              <a:buNone/>
-            </a:pPr>
             <a:r>
               <a:rPr lang="en-US" sz="1700" dirty="0">
                 <a:solidFill>
@@ -18686,9 +18146,6 @@
               </a:rPr>
               <a:t> = school clinic </a:t>
             </a:r>
-            <a:pPr algn="l" indent="0" marL="0">
-              <a:buNone/>
-            </a:pPr>
             <a:r>
               <a:rPr lang="en-US" sz="1000" b="1" dirty="0">
                 <a:solidFill>
@@ -18921,9 +18378,6 @@
               </a:rPr>
               <a:t>✅ 一</a:t>
             </a:r>
-            <a:pPr algn="l" indent="0" marL="0">
-              <a:buNone/>
-            </a:pPr>
             <a:r>
               <a:rPr lang="en-US" sz="1700" b="1" dirty="0">
                 <a:solidFill>
@@ -18935,9 +18389,6 @@
               </a:rPr>
               <a:t>个</a:t>
             </a:r>
-            <a:pPr algn="l" indent="0" marL="0">
-              <a:buNone/>
-            </a:pPr>
             <a:r>
               <a:rPr lang="en-US" sz="1700" dirty="0">
                 <a:solidFill>
@@ -19544,12 +18995,6 @@
               </a:rPr>
               <a:t>Teacher projects </a:t>
             </a:r>
-            <a:pPr algn="l" indent="0" marL="0">
-              <a:lnSpc>
-                <a:spcPts val="1740"/>
-              </a:lnSpc>
-              <a:buNone/>
-            </a:pPr>
             <a:r>
               <a:rPr lang="en-US" sz="1200" b="1" dirty="0">
                 <a:solidFill>
@@ -19561,12 +19006,6 @@
               </a:rPr>
               <a:t>one base word at a time</a:t>
             </a:r>
-            <a:pPr algn="l" indent="0" marL="0">
-              <a:lnSpc>
-                <a:spcPts val="1740"/>
-              </a:lnSpc>
-              <a:buNone/>
-            </a:pPr>
             <a:r>
               <a:rPr lang="en-US" sz="1200" dirty="0">
                 <a:solidFill>
@@ -19691,12 +19130,6 @@
               </a:rPr>
               <a:t>After each correct answer, teacher </a:t>
             </a:r>
-            <a:pPr algn="l" indent="0" marL="0">
-              <a:lnSpc>
-                <a:spcPts val="1740"/>
-              </a:lnSpc>
-              <a:buNone/>
-            </a:pPr>
             <a:r>
               <a:rPr lang="en-US" sz="1200" b="1" dirty="0">
                 <a:solidFill>
@@ -19708,12 +19141,6 @@
               </a:rPr>
               <a:t>reveals the full compound word</a:t>
             </a:r>
-            <a:pPr algn="l" indent="0" marL="0">
-              <a:lnSpc>
-                <a:spcPts val="1740"/>
-              </a:lnSpc>
-              <a:buNone/>
-            </a:pPr>
             <a:r>
               <a:rPr lang="en-US" sz="1200" dirty="0">
                 <a:solidFill>
@@ -19838,12 +19265,6 @@
               </a:rPr>
               <a:t>Final round:</a:t>
             </a:r>
-            <a:pPr algn="l" indent="0" marL="0">
-              <a:lnSpc>
-                <a:spcPts val="1740"/>
-              </a:lnSpc>
-              <a:buNone/>
-            </a:pPr>
             <a:r>
               <a:rPr lang="en-US" sz="1200" dirty="0">
                 <a:solidFill>
@@ -20272,9 +19693,6 @@
               </a:rPr>
               <a:t>图书</a:t>
             </a:r>
-            <a:pPr algn="ctr" indent="0" marL="0">
-              <a:buNone/>
-            </a:pPr>
             <a:r>
               <a:rPr lang="en-US" sz="1700" b="1" dirty="0">
                 <a:solidFill>
@@ -20361,9 +19779,6 @@
               </a:rPr>
               <a:t>体育</a:t>
             </a:r>
-            <a:pPr algn="ctr" indent="0" marL="0">
-              <a:buNone/>
-            </a:pPr>
             <a:r>
               <a:rPr lang="en-US" sz="1700" b="1" dirty="0">
                 <a:solidFill>
@@ -20450,9 +19865,6 @@
               </a:rPr>
               <a:t>篮球</a:t>
             </a:r>
-            <a:pPr algn="ctr" indent="0" marL="0">
-              <a:buNone/>
-            </a:pPr>
             <a:r>
               <a:rPr lang="en-US" sz="1700" b="1" dirty="0">
                 <a:solidFill>
@@ -20539,9 +19951,6 @@
               </a:rPr>
               <a:t>足球</a:t>
             </a:r>
-            <a:pPr algn="ctr" indent="0" marL="0">
-              <a:buNone/>
-            </a:pPr>
             <a:r>
               <a:rPr lang="en-US" sz="1700" b="1" dirty="0">
                 <a:solidFill>
@@ -20628,9 +20037,6 @@
               </a:rPr>
               <a:t>停车</a:t>
             </a:r>
-            <a:pPr algn="ctr" indent="0" marL="0">
-              <a:buNone/>
-            </a:pPr>
             <a:r>
               <a:rPr lang="en-US" sz="1700" b="1" dirty="0">
                 <a:solidFill>
@@ -20717,9 +20123,6 @@
               </a:rPr>
               <a:t>游泳</a:t>
             </a:r>
-            <a:pPr algn="ctr" indent="0" marL="0">
-              <a:buNone/>
-            </a:pPr>
             <a:r>
               <a:rPr lang="en-US" sz="1700" b="1" dirty="0">
                 <a:solidFill>
@@ -20806,9 +20209,6 @@
               </a:rPr>
               <a:t>教学</a:t>
             </a:r>
-            <a:pPr algn="ctr" indent="0" marL="0">
-              <a:buNone/>
-            </a:pPr>
             <a:r>
               <a:rPr lang="en-US" sz="1700" b="1" dirty="0">
                 <a:solidFill>
@@ -20940,12 +20340,6 @@
               </a:rPr>
               <a:t>Teacher says "music room" in English only → class produces </a:t>
             </a:r>
-            <a:pPr algn="l" indent="0" marL="0">
-              <a:lnSpc>
-                <a:spcPts val="1523"/>
-              </a:lnSpc>
-              <a:buNone/>
-            </a:pPr>
             <a:r>
               <a:rPr lang="en-US" sz="1050" b="1" dirty="0">
                 <a:solidFill>
@@ -20957,12 +20351,6 @@
               </a:rPr>
               <a:t>音乐室</a:t>
             </a:r>
-            <a:pPr algn="l" indent="0" marL="0">
-              <a:lnSpc>
-                <a:spcPts val="1523"/>
-              </a:lnSpc>
-              <a:buNone/>
-            </a:pPr>
             <a:r>
               <a:rPr lang="en-US" sz="1050" dirty="0">
                 <a:solidFill>
